--- a/輕輕聽.pptx
+++ b/輕輕聽.pptx
@@ -165,10 +165,9 @@
           <a:lstStyle/>
           <a:p>
             <a:r>
-              <a:rPr lang="zh-TW" altLang="en-US" smtClean="0"/>
+              <a:rPr lang="zh-TW" altLang="en-US"/>
               <a:t>按一下以編輯母片標題樣式</a:t>
             </a:r>
-            <a:endParaRPr lang="zh-TW" altLang="en-US"/>
           </a:p>
         </p:txBody>
       </p:sp>
@@ -284,10 +283,9 @@
           </a:lstStyle>
           <a:p>
             <a:r>
-              <a:rPr lang="zh-TW" altLang="en-US" smtClean="0"/>
+              <a:rPr lang="zh-TW" altLang="en-US"/>
               <a:t>按一下以編輯母片副標題樣式</a:t>
             </a:r>
-            <a:endParaRPr lang="zh-TW" altLang="en-US"/>
           </a:p>
         </p:txBody>
       </p:sp>
@@ -308,7 +306,7 @@
           <a:p>
             <a:fld id="{37100F3B-0D4B-4DD1-8434-B97D62E52651}" type="datetimeFigureOut">
               <a:rPr lang="zh-TW" altLang="en-US" smtClean="0"/>
-              <a:t>2022/1/22</a:t>
+              <a:t>2025/9/6</a:t>
             </a:fld>
             <a:endParaRPr lang="zh-TW" altLang="en-US"/>
           </a:p>
@@ -397,10 +395,9 @@
           <a:lstStyle/>
           <a:p>
             <a:r>
-              <a:rPr lang="zh-TW" altLang="en-US" smtClean="0"/>
+              <a:rPr lang="zh-TW" altLang="en-US"/>
               <a:t>按一下以編輯母片標題樣式</a:t>
             </a:r>
-            <a:endParaRPr lang="zh-TW" altLang="en-US"/>
           </a:p>
         </p:txBody>
       </p:sp>
@@ -421,38 +418,37 @@
           <a:p>
             <a:pPr lvl="0"/>
             <a:r>
-              <a:rPr lang="zh-TW" altLang="en-US" smtClean="0"/>
+              <a:rPr lang="zh-TW" altLang="en-US"/>
               <a:t>按一下以編輯母片文字樣式</a:t>
             </a:r>
           </a:p>
           <a:p>
             <a:pPr lvl="1"/>
             <a:r>
-              <a:rPr lang="zh-TW" altLang="en-US" smtClean="0"/>
+              <a:rPr lang="zh-TW" altLang="en-US"/>
               <a:t>第二層</a:t>
             </a:r>
           </a:p>
           <a:p>
             <a:pPr lvl="2"/>
             <a:r>
-              <a:rPr lang="zh-TW" altLang="en-US" smtClean="0"/>
+              <a:rPr lang="zh-TW" altLang="en-US"/>
               <a:t>第三層</a:t>
             </a:r>
           </a:p>
           <a:p>
             <a:pPr lvl="3"/>
             <a:r>
-              <a:rPr lang="zh-TW" altLang="en-US" smtClean="0"/>
+              <a:rPr lang="zh-TW" altLang="en-US"/>
               <a:t>第四層</a:t>
             </a:r>
           </a:p>
           <a:p>
             <a:pPr lvl="4"/>
             <a:r>
-              <a:rPr lang="zh-TW" altLang="en-US" smtClean="0"/>
+              <a:rPr lang="zh-TW" altLang="en-US"/>
               <a:t>第五層</a:t>
             </a:r>
-            <a:endParaRPr lang="zh-TW" altLang="en-US"/>
           </a:p>
         </p:txBody>
       </p:sp>
@@ -473,7 +469,7 @@
           <a:p>
             <a:fld id="{37100F3B-0D4B-4DD1-8434-B97D62E52651}" type="datetimeFigureOut">
               <a:rPr lang="zh-TW" altLang="en-US" smtClean="0"/>
-              <a:t>2022/1/22</a:t>
+              <a:t>2025/9/6</a:t>
             </a:fld>
             <a:endParaRPr lang="zh-TW" altLang="en-US"/>
           </a:p>
@@ -567,10 +563,9 @@
           <a:lstStyle/>
           <a:p>
             <a:r>
-              <a:rPr lang="zh-TW" altLang="en-US" smtClean="0"/>
+              <a:rPr lang="zh-TW" altLang="en-US"/>
               <a:t>按一下以編輯母片標題樣式</a:t>
             </a:r>
-            <a:endParaRPr lang="zh-TW" altLang="en-US"/>
           </a:p>
         </p:txBody>
       </p:sp>
@@ -596,38 +591,37 @@
           <a:p>
             <a:pPr lvl="0"/>
             <a:r>
-              <a:rPr lang="zh-TW" altLang="en-US" smtClean="0"/>
+              <a:rPr lang="zh-TW" altLang="en-US"/>
               <a:t>按一下以編輯母片文字樣式</a:t>
             </a:r>
           </a:p>
           <a:p>
             <a:pPr lvl="1"/>
             <a:r>
-              <a:rPr lang="zh-TW" altLang="en-US" smtClean="0"/>
+              <a:rPr lang="zh-TW" altLang="en-US"/>
               <a:t>第二層</a:t>
             </a:r>
           </a:p>
           <a:p>
             <a:pPr lvl="2"/>
             <a:r>
-              <a:rPr lang="zh-TW" altLang="en-US" smtClean="0"/>
+              <a:rPr lang="zh-TW" altLang="en-US"/>
               <a:t>第三層</a:t>
             </a:r>
           </a:p>
           <a:p>
             <a:pPr lvl="3"/>
             <a:r>
-              <a:rPr lang="zh-TW" altLang="en-US" smtClean="0"/>
+              <a:rPr lang="zh-TW" altLang="en-US"/>
               <a:t>第四層</a:t>
             </a:r>
           </a:p>
           <a:p>
             <a:pPr lvl="4"/>
             <a:r>
-              <a:rPr lang="zh-TW" altLang="en-US" smtClean="0"/>
+              <a:rPr lang="zh-TW" altLang="en-US"/>
               <a:t>第五層</a:t>
             </a:r>
-            <a:endParaRPr lang="zh-TW" altLang="en-US"/>
           </a:p>
         </p:txBody>
       </p:sp>
@@ -648,7 +642,7 @@
           <a:p>
             <a:fld id="{37100F3B-0D4B-4DD1-8434-B97D62E52651}" type="datetimeFigureOut">
               <a:rPr lang="zh-TW" altLang="en-US" smtClean="0"/>
-              <a:t>2022/1/22</a:t>
+              <a:t>2025/9/6</a:t>
             </a:fld>
             <a:endParaRPr lang="zh-TW" altLang="en-US"/>
           </a:p>
@@ -737,10 +731,9 @@
           <a:lstStyle/>
           <a:p>
             <a:r>
-              <a:rPr lang="zh-TW" altLang="en-US" smtClean="0"/>
+              <a:rPr lang="zh-TW" altLang="en-US"/>
               <a:t>按一下以編輯母片標題樣式</a:t>
             </a:r>
-            <a:endParaRPr lang="zh-TW" altLang="en-US"/>
           </a:p>
         </p:txBody>
       </p:sp>
@@ -761,38 +754,37 @@
           <a:p>
             <a:pPr lvl="0"/>
             <a:r>
-              <a:rPr lang="zh-TW" altLang="en-US" smtClean="0"/>
+              <a:rPr lang="zh-TW" altLang="en-US"/>
               <a:t>按一下以編輯母片文字樣式</a:t>
             </a:r>
           </a:p>
           <a:p>
             <a:pPr lvl="1"/>
             <a:r>
-              <a:rPr lang="zh-TW" altLang="en-US" smtClean="0"/>
+              <a:rPr lang="zh-TW" altLang="en-US"/>
               <a:t>第二層</a:t>
             </a:r>
           </a:p>
           <a:p>
             <a:pPr lvl="2"/>
             <a:r>
-              <a:rPr lang="zh-TW" altLang="en-US" smtClean="0"/>
+              <a:rPr lang="zh-TW" altLang="en-US"/>
               <a:t>第三層</a:t>
             </a:r>
           </a:p>
           <a:p>
             <a:pPr lvl="3"/>
             <a:r>
-              <a:rPr lang="zh-TW" altLang="en-US" smtClean="0"/>
+              <a:rPr lang="zh-TW" altLang="en-US"/>
               <a:t>第四層</a:t>
             </a:r>
           </a:p>
           <a:p>
             <a:pPr lvl="4"/>
             <a:r>
-              <a:rPr lang="zh-TW" altLang="en-US" smtClean="0"/>
+              <a:rPr lang="zh-TW" altLang="en-US"/>
               <a:t>第五層</a:t>
             </a:r>
-            <a:endParaRPr lang="zh-TW" altLang="en-US"/>
           </a:p>
         </p:txBody>
       </p:sp>
@@ -813,7 +805,7 @@
           <a:p>
             <a:fld id="{37100F3B-0D4B-4DD1-8434-B97D62E52651}" type="datetimeFigureOut">
               <a:rPr lang="zh-TW" altLang="en-US" smtClean="0"/>
-              <a:t>2022/1/22</a:t>
+              <a:t>2025/9/6</a:t>
             </a:fld>
             <a:endParaRPr lang="zh-TW" altLang="en-US"/>
           </a:p>
@@ -911,10 +903,9 @@
           </a:lstStyle>
           <a:p>
             <a:r>
-              <a:rPr lang="zh-TW" altLang="en-US" smtClean="0"/>
+              <a:rPr lang="zh-TW" altLang="en-US"/>
               <a:t>按一下以編輯母片標題樣式</a:t>
             </a:r>
-            <a:endParaRPr lang="zh-TW" altLang="en-US"/>
           </a:p>
         </p:txBody>
       </p:sp>
@@ -1031,7 +1022,7 @@
           <a:p>
             <a:pPr lvl="0"/>
             <a:r>
-              <a:rPr lang="zh-TW" altLang="en-US" smtClean="0"/>
+              <a:rPr lang="zh-TW" altLang="en-US"/>
               <a:t>按一下以編輯母片文字樣式</a:t>
             </a:r>
           </a:p>
@@ -1054,7 +1045,7 @@
           <a:p>
             <a:fld id="{37100F3B-0D4B-4DD1-8434-B97D62E52651}" type="datetimeFigureOut">
               <a:rPr lang="zh-TW" altLang="en-US" smtClean="0"/>
-              <a:t>2022/1/22</a:t>
+              <a:t>2025/9/6</a:t>
             </a:fld>
             <a:endParaRPr lang="zh-TW" altLang="en-US"/>
           </a:p>
@@ -1143,10 +1134,9 @@
           <a:lstStyle/>
           <a:p>
             <a:r>
-              <a:rPr lang="zh-TW" altLang="en-US" smtClean="0"/>
+              <a:rPr lang="zh-TW" altLang="en-US"/>
               <a:t>按一下以編輯母片標題樣式</a:t>
             </a:r>
-            <a:endParaRPr lang="zh-TW" altLang="en-US"/>
           </a:p>
         </p:txBody>
       </p:sp>
@@ -1200,38 +1190,37 @@
           <a:p>
             <a:pPr lvl="0"/>
             <a:r>
-              <a:rPr lang="zh-TW" altLang="en-US" smtClean="0"/>
+              <a:rPr lang="zh-TW" altLang="en-US"/>
               <a:t>按一下以編輯母片文字樣式</a:t>
             </a:r>
           </a:p>
           <a:p>
             <a:pPr lvl="1"/>
             <a:r>
-              <a:rPr lang="zh-TW" altLang="en-US" smtClean="0"/>
+              <a:rPr lang="zh-TW" altLang="en-US"/>
               <a:t>第二層</a:t>
             </a:r>
           </a:p>
           <a:p>
             <a:pPr lvl="2"/>
             <a:r>
-              <a:rPr lang="zh-TW" altLang="en-US" smtClean="0"/>
+              <a:rPr lang="zh-TW" altLang="en-US"/>
               <a:t>第三層</a:t>
             </a:r>
           </a:p>
           <a:p>
             <a:pPr lvl="3"/>
             <a:r>
-              <a:rPr lang="zh-TW" altLang="en-US" smtClean="0"/>
+              <a:rPr lang="zh-TW" altLang="en-US"/>
               <a:t>第四層</a:t>
             </a:r>
           </a:p>
           <a:p>
             <a:pPr lvl="4"/>
             <a:r>
-              <a:rPr lang="zh-TW" altLang="en-US" smtClean="0"/>
+              <a:rPr lang="zh-TW" altLang="en-US"/>
               <a:t>第五層</a:t>
             </a:r>
-            <a:endParaRPr lang="zh-TW" altLang="en-US"/>
           </a:p>
         </p:txBody>
       </p:sp>
@@ -1285,38 +1274,37 @@
           <a:p>
             <a:pPr lvl="0"/>
             <a:r>
-              <a:rPr lang="zh-TW" altLang="en-US" smtClean="0"/>
+              <a:rPr lang="zh-TW" altLang="en-US"/>
               <a:t>按一下以編輯母片文字樣式</a:t>
             </a:r>
           </a:p>
           <a:p>
             <a:pPr lvl="1"/>
             <a:r>
-              <a:rPr lang="zh-TW" altLang="en-US" smtClean="0"/>
+              <a:rPr lang="zh-TW" altLang="en-US"/>
               <a:t>第二層</a:t>
             </a:r>
           </a:p>
           <a:p>
             <a:pPr lvl="2"/>
             <a:r>
-              <a:rPr lang="zh-TW" altLang="en-US" smtClean="0"/>
+              <a:rPr lang="zh-TW" altLang="en-US"/>
               <a:t>第三層</a:t>
             </a:r>
           </a:p>
           <a:p>
             <a:pPr lvl="3"/>
             <a:r>
-              <a:rPr lang="zh-TW" altLang="en-US" smtClean="0"/>
+              <a:rPr lang="zh-TW" altLang="en-US"/>
               <a:t>第四層</a:t>
             </a:r>
           </a:p>
           <a:p>
             <a:pPr lvl="4"/>
             <a:r>
-              <a:rPr lang="zh-TW" altLang="en-US" smtClean="0"/>
+              <a:rPr lang="zh-TW" altLang="en-US"/>
               <a:t>第五層</a:t>
             </a:r>
-            <a:endParaRPr lang="zh-TW" altLang="en-US"/>
           </a:p>
         </p:txBody>
       </p:sp>
@@ -1337,7 +1325,7 @@
           <a:p>
             <a:fld id="{37100F3B-0D4B-4DD1-8434-B97D62E52651}" type="datetimeFigureOut">
               <a:rPr lang="zh-TW" altLang="en-US" smtClean="0"/>
-              <a:t>2022/1/22</a:t>
+              <a:t>2025/9/6</a:t>
             </a:fld>
             <a:endParaRPr lang="zh-TW" altLang="en-US"/>
           </a:p>
@@ -1430,10 +1418,9 @@
           </a:lstStyle>
           <a:p>
             <a:r>
-              <a:rPr lang="zh-TW" altLang="en-US" smtClean="0"/>
+              <a:rPr lang="zh-TW" altLang="en-US"/>
               <a:t>按一下以編輯母片標題樣式</a:t>
             </a:r>
-            <a:endParaRPr lang="zh-TW" altLang="en-US"/>
           </a:p>
         </p:txBody>
       </p:sp>
@@ -1496,7 +1483,7 @@
           <a:p>
             <a:pPr lvl="0"/>
             <a:r>
-              <a:rPr lang="zh-TW" altLang="en-US" smtClean="0"/>
+              <a:rPr lang="zh-TW" altLang="en-US"/>
               <a:t>按一下以編輯母片文字樣式</a:t>
             </a:r>
           </a:p>
@@ -1552,38 +1539,37 @@
           <a:p>
             <a:pPr lvl="0"/>
             <a:r>
-              <a:rPr lang="zh-TW" altLang="en-US" smtClean="0"/>
+              <a:rPr lang="zh-TW" altLang="en-US"/>
               <a:t>按一下以編輯母片文字樣式</a:t>
             </a:r>
           </a:p>
           <a:p>
             <a:pPr lvl="1"/>
             <a:r>
-              <a:rPr lang="zh-TW" altLang="en-US" smtClean="0"/>
+              <a:rPr lang="zh-TW" altLang="en-US"/>
               <a:t>第二層</a:t>
             </a:r>
           </a:p>
           <a:p>
             <a:pPr lvl="2"/>
             <a:r>
-              <a:rPr lang="zh-TW" altLang="en-US" smtClean="0"/>
+              <a:rPr lang="zh-TW" altLang="en-US"/>
               <a:t>第三層</a:t>
             </a:r>
           </a:p>
           <a:p>
             <a:pPr lvl="3"/>
             <a:r>
-              <a:rPr lang="zh-TW" altLang="en-US" smtClean="0"/>
+              <a:rPr lang="zh-TW" altLang="en-US"/>
               <a:t>第四層</a:t>
             </a:r>
           </a:p>
           <a:p>
             <a:pPr lvl="4"/>
             <a:r>
-              <a:rPr lang="zh-TW" altLang="en-US" smtClean="0"/>
+              <a:rPr lang="zh-TW" altLang="en-US"/>
               <a:t>第五層</a:t>
             </a:r>
-            <a:endParaRPr lang="zh-TW" altLang="en-US"/>
           </a:p>
         </p:txBody>
       </p:sp>
@@ -1646,7 +1632,7 @@
           <a:p>
             <a:pPr lvl="0"/>
             <a:r>
-              <a:rPr lang="zh-TW" altLang="en-US" smtClean="0"/>
+              <a:rPr lang="zh-TW" altLang="en-US"/>
               <a:t>按一下以編輯母片文字樣式</a:t>
             </a:r>
           </a:p>
@@ -1702,38 +1688,37 @@
           <a:p>
             <a:pPr lvl="0"/>
             <a:r>
-              <a:rPr lang="zh-TW" altLang="en-US" smtClean="0"/>
+              <a:rPr lang="zh-TW" altLang="en-US"/>
               <a:t>按一下以編輯母片文字樣式</a:t>
             </a:r>
           </a:p>
           <a:p>
             <a:pPr lvl="1"/>
             <a:r>
-              <a:rPr lang="zh-TW" altLang="en-US" smtClean="0"/>
+              <a:rPr lang="zh-TW" altLang="en-US"/>
               <a:t>第二層</a:t>
             </a:r>
           </a:p>
           <a:p>
             <a:pPr lvl="2"/>
             <a:r>
-              <a:rPr lang="zh-TW" altLang="en-US" smtClean="0"/>
+              <a:rPr lang="zh-TW" altLang="en-US"/>
               <a:t>第三層</a:t>
             </a:r>
           </a:p>
           <a:p>
             <a:pPr lvl="3"/>
             <a:r>
-              <a:rPr lang="zh-TW" altLang="en-US" smtClean="0"/>
+              <a:rPr lang="zh-TW" altLang="en-US"/>
               <a:t>第四層</a:t>
             </a:r>
           </a:p>
           <a:p>
             <a:pPr lvl="4"/>
             <a:r>
-              <a:rPr lang="zh-TW" altLang="en-US" smtClean="0"/>
+              <a:rPr lang="zh-TW" altLang="en-US"/>
               <a:t>第五層</a:t>
             </a:r>
-            <a:endParaRPr lang="zh-TW" altLang="en-US"/>
           </a:p>
         </p:txBody>
       </p:sp>
@@ -1754,7 +1739,7 @@
           <a:p>
             <a:fld id="{37100F3B-0D4B-4DD1-8434-B97D62E52651}" type="datetimeFigureOut">
               <a:rPr lang="zh-TW" altLang="en-US" smtClean="0"/>
-              <a:t>2022/1/22</a:t>
+              <a:t>2025/9/6</a:t>
             </a:fld>
             <a:endParaRPr lang="zh-TW" altLang="en-US"/>
           </a:p>
@@ -1843,10 +1828,9 @@
           <a:lstStyle/>
           <a:p>
             <a:r>
-              <a:rPr lang="zh-TW" altLang="en-US" smtClean="0"/>
+              <a:rPr lang="zh-TW" altLang="en-US"/>
               <a:t>按一下以編輯母片標題樣式</a:t>
             </a:r>
-            <a:endParaRPr lang="zh-TW" altLang="en-US"/>
           </a:p>
         </p:txBody>
       </p:sp>
@@ -1867,7 +1851,7 @@
           <a:p>
             <a:fld id="{37100F3B-0D4B-4DD1-8434-B97D62E52651}" type="datetimeFigureOut">
               <a:rPr lang="zh-TW" altLang="en-US" smtClean="0"/>
-              <a:t>2022/1/22</a:t>
+              <a:t>2025/9/6</a:t>
             </a:fld>
             <a:endParaRPr lang="zh-TW" altLang="en-US"/>
           </a:p>
@@ -1957,7 +1941,7 @@
           <a:p>
             <a:fld id="{37100F3B-0D4B-4DD1-8434-B97D62E52651}" type="datetimeFigureOut">
               <a:rPr lang="zh-TW" altLang="en-US" smtClean="0"/>
-              <a:t>2022/1/22</a:t>
+              <a:t>2025/9/6</a:t>
             </a:fld>
             <a:endParaRPr lang="zh-TW" altLang="en-US"/>
           </a:p>
@@ -2055,10 +2039,9 @@
           </a:lstStyle>
           <a:p>
             <a:r>
-              <a:rPr lang="zh-TW" altLang="en-US" smtClean="0"/>
+              <a:rPr lang="zh-TW" altLang="en-US"/>
               <a:t>按一下以編輯母片標題樣式</a:t>
             </a:r>
-            <a:endParaRPr lang="zh-TW" altLang="en-US"/>
           </a:p>
         </p:txBody>
       </p:sp>
@@ -2112,38 +2095,37 @@
           <a:p>
             <a:pPr lvl="0"/>
             <a:r>
-              <a:rPr lang="zh-TW" altLang="en-US" smtClean="0"/>
+              <a:rPr lang="zh-TW" altLang="en-US"/>
               <a:t>按一下以編輯母片文字樣式</a:t>
             </a:r>
           </a:p>
           <a:p>
             <a:pPr lvl="1"/>
             <a:r>
-              <a:rPr lang="zh-TW" altLang="en-US" smtClean="0"/>
+              <a:rPr lang="zh-TW" altLang="en-US"/>
               <a:t>第二層</a:t>
             </a:r>
           </a:p>
           <a:p>
             <a:pPr lvl="2"/>
             <a:r>
-              <a:rPr lang="zh-TW" altLang="en-US" smtClean="0"/>
+              <a:rPr lang="zh-TW" altLang="en-US"/>
               <a:t>第三層</a:t>
             </a:r>
           </a:p>
           <a:p>
             <a:pPr lvl="3"/>
             <a:r>
-              <a:rPr lang="zh-TW" altLang="en-US" smtClean="0"/>
+              <a:rPr lang="zh-TW" altLang="en-US"/>
               <a:t>第四層</a:t>
             </a:r>
           </a:p>
           <a:p>
             <a:pPr lvl="4"/>
             <a:r>
-              <a:rPr lang="zh-TW" altLang="en-US" smtClean="0"/>
+              <a:rPr lang="zh-TW" altLang="en-US"/>
               <a:t>第五層</a:t>
             </a:r>
-            <a:endParaRPr lang="zh-TW" altLang="en-US"/>
           </a:p>
         </p:txBody>
       </p:sp>
@@ -2206,7 +2188,7 @@
           <a:p>
             <a:pPr lvl="0"/>
             <a:r>
-              <a:rPr lang="zh-TW" altLang="en-US" smtClean="0"/>
+              <a:rPr lang="zh-TW" altLang="en-US"/>
               <a:t>按一下以編輯母片文字樣式</a:t>
             </a:r>
           </a:p>
@@ -2229,7 +2211,7 @@
           <a:p>
             <a:fld id="{37100F3B-0D4B-4DD1-8434-B97D62E52651}" type="datetimeFigureOut">
               <a:rPr lang="zh-TW" altLang="en-US" smtClean="0"/>
-              <a:t>2022/1/22</a:t>
+              <a:t>2025/9/6</a:t>
             </a:fld>
             <a:endParaRPr lang="zh-TW" altLang="en-US"/>
           </a:p>
@@ -2327,10 +2309,9 @@
           </a:lstStyle>
           <a:p>
             <a:r>
-              <a:rPr lang="zh-TW" altLang="en-US" smtClean="0"/>
+              <a:rPr lang="zh-TW" altLang="en-US"/>
               <a:t>按一下以編輯母片標題樣式</a:t>
             </a:r>
-            <a:endParaRPr lang="zh-TW" altLang="en-US"/>
           </a:p>
         </p:txBody>
       </p:sp>
@@ -2392,10 +2373,9 @@
           </a:lstStyle>
           <a:p>
             <a:r>
-              <a:rPr lang="zh-TW" altLang="en-US" smtClean="0"/>
+              <a:rPr lang="zh-TW" altLang="en-US"/>
               <a:t>按一下圖示以新增圖片</a:t>
             </a:r>
-            <a:endParaRPr lang="zh-TW" altLang="en-US"/>
           </a:p>
         </p:txBody>
       </p:sp>
@@ -2458,7 +2438,7 @@
           <a:p>
             <a:pPr lvl="0"/>
             <a:r>
-              <a:rPr lang="zh-TW" altLang="en-US" smtClean="0"/>
+              <a:rPr lang="zh-TW" altLang="en-US"/>
               <a:t>按一下以編輯母片文字樣式</a:t>
             </a:r>
           </a:p>
@@ -2481,7 +2461,7 @@
           <a:p>
             <a:fld id="{37100F3B-0D4B-4DD1-8434-B97D62E52651}" type="datetimeFigureOut">
               <a:rPr lang="zh-TW" altLang="en-US" smtClean="0"/>
-              <a:t>2022/1/22</a:t>
+              <a:t>2025/9/6</a:t>
             </a:fld>
             <a:endParaRPr lang="zh-TW" altLang="en-US"/>
           </a:p>
@@ -2590,10 +2570,9 @@
           <a:lstStyle/>
           <a:p>
             <a:r>
-              <a:rPr lang="zh-TW" altLang="en-US" smtClean="0"/>
+              <a:rPr lang="zh-TW" altLang="en-US"/>
               <a:t>按一下以編輯母片標題樣式</a:t>
             </a:r>
-            <a:endParaRPr lang="zh-TW" altLang="en-US"/>
           </a:p>
         </p:txBody>
       </p:sp>
@@ -2624,38 +2603,37 @@
           <a:p>
             <a:pPr lvl="0"/>
             <a:r>
-              <a:rPr lang="zh-TW" altLang="en-US" smtClean="0"/>
+              <a:rPr lang="zh-TW" altLang="en-US"/>
               <a:t>按一下以編輯母片文字樣式</a:t>
             </a:r>
           </a:p>
           <a:p>
             <a:pPr lvl="1"/>
             <a:r>
-              <a:rPr lang="zh-TW" altLang="en-US" smtClean="0"/>
+              <a:rPr lang="zh-TW" altLang="en-US"/>
               <a:t>第二層</a:t>
             </a:r>
           </a:p>
           <a:p>
             <a:pPr lvl="2"/>
             <a:r>
-              <a:rPr lang="zh-TW" altLang="en-US" smtClean="0"/>
+              <a:rPr lang="zh-TW" altLang="en-US"/>
               <a:t>第三層</a:t>
             </a:r>
           </a:p>
           <a:p>
             <a:pPr lvl="3"/>
             <a:r>
-              <a:rPr lang="zh-TW" altLang="en-US" smtClean="0"/>
+              <a:rPr lang="zh-TW" altLang="en-US"/>
               <a:t>第四層</a:t>
             </a:r>
           </a:p>
           <a:p>
             <a:pPr lvl="4"/>
             <a:r>
-              <a:rPr lang="zh-TW" altLang="en-US" smtClean="0"/>
+              <a:rPr lang="zh-TW" altLang="en-US"/>
               <a:t>第五層</a:t>
             </a:r>
-            <a:endParaRPr lang="zh-TW" altLang="en-US"/>
           </a:p>
         </p:txBody>
       </p:sp>
@@ -2694,7 +2672,7 @@
           <a:p>
             <a:fld id="{37100F3B-0D4B-4DD1-8434-B97D62E52651}" type="datetimeFigureOut">
               <a:rPr lang="zh-TW" altLang="en-US" smtClean="0"/>
-              <a:t>2022/1/22</a:t>
+              <a:t>2025/9/6</a:t>
             </a:fld>
             <a:endParaRPr lang="zh-TW" altLang="en-US"/>
           </a:p>
@@ -3249,6 +3227,16 @@
               <a:t>正</a:t>
             </a:r>
             <a:r>
+              <a:rPr lang="zh-CN" altLang="en-US" sz="4800" b="1" dirty="0">
+                <a:solidFill>
+                  <a:srgbClr val="660033"/>
+                </a:solidFill>
+                <a:latin typeface="Microsoft JhengHei" panose="020B0604030504040204" pitchFamily="34" charset="-120"/>
+                <a:ea typeface="Microsoft JhengHei" panose="020B0604030504040204" pitchFamily="34" charset="-120"/>
+              </a:rPr>
+              <a:t>歌</a:t>
+            </a:r>
+            <a:r>
               <a:rPr lang="en-US" sz="4800" b="1" dirty="0">
                 <a:solidFill>
                   <a:srgbClr val="660033"/>
@@ -3388,7 +3376,6 @@
                 <a:solidFill>
                   <a:srgbClr val="660033"/>
                 </a:solidFill>
-                <a:effectLst/>
                 <a:latin typeface="Microsoft JhengHei" panose="020B0604030504040204" pitchFamily="34" charset="-120"/>
                 <a:ea typeface="Microsoft JhengHei" panose="020B0604030504040204" pitchFamily="34" charset="-120"/>
               </a:rPr>
@@ -3399,18 +3386,16 @@
                 <a:solidFill>
                   <a:srgbClr val="660033"/>
                 </a:solidFill>
-                <a:effectLst/>
                 <a:latin typeface="Microsoft JhengHei" panose="020B0604030504040204" pitchFamily="34" charset="-120"/>
                 <a:ea typeface="Microsoft JhengHei" panose="020B0604030504040204" pitchFamily="34" charset="-120"/>
               </a:rPr>
-              <a:t>正</a:t>
+              <a:t>正歌</a:t>
             </a:r>
             <a:r>
               <a:rPr lang="en-US" sz="4800" b="1" dirty="0">
                 <a:solidFill>
                   <a:srgbClr val="660033"/>
                 </a:solidFill>
-                <a:effectLst/>
                 <a:latin typeface="Microsoft JhengHei" panose="020B0604030504040204" pitchFamily="34" charset="-120"/>
                 <a:ea typeface="Microsoft JhengHei" panose="020B0604030504040204" pitchFamily="34" charset="-120"/>
               </a:rPr>
@@ -3420,7 +3405,6 @@
               <a:solidFill>
                 <a:srgbClr val="660033"/>
               </a:solidFill>
-              <a:effectLst/>
               <a:latin typeface="Microsoft JhengHei" panose="020B0604030504040204" pitchFamily="34" charset="-120"/>
               <a:ea typeface="Microsoft JhengHei" panose="020B0604030504040204" pitchFamily="34" charset="-120"/>
             </a:endParaRPr>
@@ -3490,7 +3474,7 @@
                 <a:latin typeface="微軟正黑體" pitchFamily="34" charset="-120"/>
                 <a:ea typeface="微軟正黑體" pitchFamily="34" charset="-120"/>
               </a:rPr>
-              <a:t>袮</a:t>
+              <a:t>祢</a:t>
             </a:r>
             <a:r>
               <a:rPr lang="zh-TW" altLang="en-US" sz="6400" b="1" dirty="0">
@@ -3569,7 +3553,7 @@
               <a:t>( </a:t>
             </a:r>
             <a:r>
-              <a:rPr lang="zh-CN" altLang="en-US" sz="4800" b="1" dirty="0" smtClean="0">
+              <a:rPr lang="zh-CN" altLang="en-US" sz="4800" b="1" dirty="0">
                 <a:solidFill>
                   <a:srgbClr val="660033"/>
                 </a:solidFill>
@@ -3580,7 +3564,17 @@
               <a:t>副</a:t>
             </a:r>
             <a:r>
-              <a:rPr lang="en-US" sz="4800" b="1" dirty="0" smtClean="0">
+              <a:rPr lang="zh-CN" altLang="en-US" sz="4800" b="1" dirty="0">
+                <a:solidFill>
+                  <a:srgbClr val="660033"/>
+                </a:solidFill>
+                <a:latin typeface="Microsoft JhengHei" panose="020B0604030504040204" pitchFamily="34" charset="-120"/>
+                <a:ea typeface="Microsoft JhengHei" panose="020B0604030504040204" pitchFamily="34" charset="-120"/>
+              </a:rPr>
+              <a:t>歌</a:t>
+            </a:r>
+            <a:r>
+              <a:rPr lang="en-US" sz="4800" b="1" dirty="0">
                 <a:solidFill>
                   <a:srgbClr val="660033"/>
                 </a:solidFill>
@@ -3588,18 +3582,7 @@
                 <a:latin typeface="Microsoft JhengHei" panose="020B0604030504040204" pitchFamily="34" charset="-120"/>
                 <a:ea typeface="Microsoft JhengHei" panose="020B0604030504040204" pitchFamily="34" charset="-120"/>
               </a:rPr>
-              <a:t> </a:t>
-            </a:r>
-            <a:r>
-              <a:rPr lang="en-US" sz="4800" b="1" dirty="0">
-                <a:solidFill>
-                  <a:srgbClr val="660033"/>
-                </a:solidFill>
-                <a:effectLst/>
-                <a:latin typeface="Microsoft JhengHei" panose="020B0604030504040204" pitchFamily="34" charset="-120"/>
-                <a:ea typeface="Microsoft JhengHei" panose="020B0604030504040204" pitchFamily="34" charset="-120"/>
-              </a:rPr>
-              <a:t>)</a:t>
+              <a:t> )</a:t>
             </a:r>
             <a:endParaRPr lang="vi-VN" sz="4800" b="1" dirty="0">
               <a:solidFill>
@@ -3675,7 +3658,7 @@
                 <a:latin typeface="微軟正黑體" pitchFamily="34" charset="-120"/>
                 <a:ea typeface="微軟正黑體" pitchFamily="34" charset="-120"/>
               </a:rPr>
-              <a:t>袮</a:t>
+              <a:t>祢</a:t>
             </a:r>
             <a:r>
               <a:rPr lang="zh-TW" altLang="en-US" sz="6400" b="1" dirty="0">
@@ -3740,50 +3723,35 @@
                 <a:solidFill>
                   <a:srgbClr val="660033"/>
                 </a:solidFill>
-                <a:effectLst/>
                 <a:latin typeface="Microsoft JhengHei" panose="020B0604030504040204" pitchFamily="34" charset="-120"/>
                 <a:ea typeface="Microsoft JhengHei" panose="020B0604030504040204" pitchFamily="34" charset="-120"/>
               </a:rPr>
               <a:t>( </a:t>
             </a:r>
             <a:r>
-              <a:rPr lang="zh-CN" altLang="en-US" sz="4800" b="1" dirty="0" smtClean="0">
+              <a:rPr lang="zh-CN" altLang="en-US" sz="4800" b="1" dirty="0">
                 <a:solidFill>
                   <a:srgbClr val="660033"/>
                 </a:solidFill>
-                <a:effectLst/>
                 <a:latin typeface="Microsoft JhengHei" panose="020B0604030504040204" pitchFamily="34" charset="-120"/>
                 <a:ea typeface="Microsoft JhengHei" panose="020B0604030504040204" pitchFamily="34" charset="-120"/>
               </a:rPr>
-              <a:t>副</a:t>
-            </a:r>
-            <a:r>
-              <a:rPr lang="en-US" sz="4800" b="1" dirty="0" smtClean="0">
+              <a:t>副歌</a:t>
+            </a:r>
+            <a:r>
+              <a:rPr lang="en-US" sz="4800" b="1" dirty="0">
                 <a:solidFill>
                   <a:srgbClr val="660033"/>
                 </a:solidFill>
-                <a:effectLst/>
                 <a:latin typeface="Microsoft JhengHei" panose="020B0604030504040204" pitchFamily="34" charset="-120"/>
                 <a:ea typeface="Microsoft JhengHei" panose="020B0604030504040204" pitchFamily="34" charset="-120"/>
               </a:rPr>
-              <a:t> </a:t>
-            </a:r>
-            <a:r>
-              <a:rPr lang="en-US" sz="4800" b="1" dirty="0">
-                <a:solidFill>
-                  <a:srgbClr val="660033"/>
-                </a:solidFill>
-                <a:effectLst/>
-                <a:latin typeface="Microsoft JhengHei" panose="020B0604030504040204" pitchFamily="34" charset="-120"/>
-                <a:ea typeface="Microsoft JhengHei" panose="020B0604030504040204" pitchFamily="34" charset="-120"/>
-              </a:rPr>
-              <a:t>)</a:t>
+              <a:t> )</a:t>
             </a:r>
             <a:endParaRPr lang="vi-VN" sz="4800" b="1" dirty="0">
               <a:solidFill>
                 <a:srgbClr val="660033"/>
               </a:solidFill>
-              <a:effectLst/>
               <a:latin typeface="Microsoft JhengHei" panose="020B0604030504040204" pitchFamily="34" charset="-120"/>
               <a:ea typeface="Microsoft JhengHei" panose="020B0604030504040204" pitchFamily="34" charset="-120"/>
             </a:endParaRPr>
